--- a/slide/pptx/P13-WiFi-dan-MQTT.pptx
+++ b/slide/pptx/P13-WiFi-dan-MQTT.pptx
@@ -131,14 +131,14 @@
   <p:extLst>
     <p:ext uri="{521415D9-36F7-43E2-AB2F-B90AF26B5E84}">
       <p14:sectionLst xmlns:p14="http://schemas.microsoft.com/office/powerpoint/2010/main">
-        <p14:section name="Pembuka" id="{c9059963-3780-6a6b-3821-680d00305665}">
+        <p14:section name="Pembuka" id="{c0ab5c7a-d742-acf6-18d9-9ba7ec025e3c}">
           <p14:sldIdLst>
             <p14:sldId id="256"/>
             <p14:sldId id="257"/>
             <p14:sldId id="258"/>
           </p14:sldIdLst>
         </p14:section>
-        <p14:section name="Wi-Fi" id="{5161df75-e078-01ab-a4db-b2255945d6dc}">
+        <p14:section name="Wi-Fi" id="{2dd79ff3-c2bb-844c-3277-e54d19a10932}">
           <p14:sldIdLst>
             <p14:sldId id="259"/>
             <p14:sldId id="260"/>
@@ -149,7 +149,7 @@
             <p14:sldId id="265"/>
           </p14:sldIdLst>
         </p14:section>
-        <p14:section name="MQTT" id="{fdd864c7-fd68-9409-05e0-fc643dacc170}">
+        <p14:section name="MQTT" id="{7711b86d-238e-191b-9988-43ff7dd8c00c}">
           <p14:sldIdLst>
             <p14:sldId id="266"/>
             <p14:sldId id="267"/>
@@ -162,7 +162,7 @@
             <p14:sldId id="274"/>
           </p14:sldIdLst>
         </p14:section>
-        <p14:section name="Praktikum" id="{d319a1aa-1473-7cf8-a283-ed0fce3a5256}">
+        <p14:section name="Praktikum" id="{853c8052-bc2d-8f6a-02cb-c27a2a8b27db}">
           <p14:sldIdLst>
             <p14:sldId id="275"/>
             <p14:sldId id="276"/>
@@ -170,7 +170,7 @@
             <p14:sldId id="278"/>
           </p14:sldIdLst>
         </p14:section>
-        <p14:section name="Penutup" id="{2baeb8c3-248f-94fc-89c2-801d738a937d}">
+        <p14:section name="Penutup" id="{e4f77c13-8ece-f440-ada4-4f63a79ab259}">
           <p14:sldIdLst>
             <p14:sldId id="279"/>
             <p14:sldId id="280"/>
@@ -8047,7 +8047,7 @@
                   <a:schemeClr val="tx1"/>
                 </a:solidFill>
               </a:rPr>
-              <a:t>Memindai Wi-Fi (SSID, RSSI, kanal) dan menyambung dalam mode </a:t>
+              <a:t>Memindai jaringan Wi-Fi (nama, kuat sinyal, kanal) lalu menyambung sebagai klien (mode </a:t>
             </a:r>
             <a:r>
               <a:rPr lang="en-US" sz="2000" b="1" dirty="0">
@@ -8056,6 +8056,14 @@
                 </a:solidFill>
               </a:rPr>
               <a:t>STA</a:t>
+            </a:r>
+            <a:r>
+              <a:rPr lang="en-US" sz="2000" dirty="0">
+                <a:solidFill>
+                  <a:schemeClr val="tx1"/>
+                </a:solidFill>
+              </a:rPr>
+              <a:t>)</a:t>
             </a:r>
             <a:endParaRPr lang="en-US" sz="2000" dirty="0"/>
           </a:p>
@@ -11850,7 +11858,7 @@
                   <a:schemeClr val="tx1"/>
                 </a:solidFill>
               </a:rPr>
-              <a:t>LWT </a:t>
+              <a:t>Topik </a:t>
             </a:r>
             <a:r>
               <a:rPr lang="en-US" sz="1700" dirty="0">
@@ -11861,6 +11869,44 @@
                 <a:ea typeface="Consolas" pitchFamily="34" charset="-122"/>
                 <a:cs typeface="Consolas" pitchFamily="34" charset="-120"/>
               </a:rPr>
+              <a:t>…/status</a:t>
+            </a:r>
+            <a:r>
+              <a:rPr lang="en-US" sz="1700" dirty="0">
+                <a:solidFill>
+                  <a:schemeClr val="tx1"/>
+                </a:solidFill>
+              </a:rPr>
+              <a:t> berisi </a:t>
+            </a:r>
+            <a:r>
+              <a:rPr lang="en-US" sz="1700" dirty="0">
+                <a:solidFill>
+                  <a:srgbClr val="A35F14"/>
+                </a:solidFill>
+                <a:latin typeface="Consolas" pitchFamily="34" charset="0"/>
+                <a:ea typeface="Consolas" pitchFamily="34" charset="-122"/>
+                <a:cs typeface="Consolas" pitchFamily="34" charset="-120"/>
+              </a:rPr>
+              <a:t>online</a:t>
+            </a:r>
+            <a:r>
+              <a:rPr lang="en-US" sz="1700" dirty="0">
+                <a:solidFill>
+                  <a:schemeClr val="tx1"/>
+                </a:solidFill>
+              </a:rPr>
+              <a:t> atau </a:t>
+            </a:r>
+            <a:r>
+              <a:rPr lang="en-US" sz="1700" dirty="0">
+                <a:solidFill>
+                  <a:srgbClr val="A35F14"/>
+                </a:solidFill>
+                <a:latin typeface="Consolas" pitchFamily="34" charset="0"/>
+                <a:ea typeface="Consolas" pitchFamily="34" charset="-122"/>
+                <a:cs typeface="Consolas" pitchFamily="34" charset="-120"/>
+              </a:rPr>
               <a:t>offline</a:t>
             </a:r>
             <a:r>
@@ -11869,18 +11915,34 @@
                   <a:schemeClr val="tx1"/>
                 </a:solidFill>
               </a:rPr>
-              <a:t> + </a:t>
+              <a:t> (</a:t>
+            </a:r>
+            <a:r>
+              <a:rPr lang="en-US" sz="1700" i="1" dirty="0">
+                <a:solidFill>
+                  <a:schemeClr val="tx1"/>
+                </a:solidFill>
+              </a:rPr>
+              <a:t>retain</a:t>
             </a:r>
             <a:r>
               <a:rPr lang="en-US" sz="1700" dirty="0">
                 <a:solidFill>
+                  <a:schemeClr val="tx1"/>
+                </a:solidFill>
+              </a:rPr>
+              <a:t>); </a:t>
+            </a:r>
+            <a:r>
+              <a:rPr lang="en-US" sz="1700" dirty="0">
+                <a:solidFill>
                   <a:srgbClr val="A35F14"/>
                 </a:solidFill>
                 <a:latin typeface="Consolas" pitchFamily="34" charset="0"/>
                 <a:ea typeface="Consolas" pitchFamily="34" charset="-122"/>
                 <a:cs typeface="Consolas" pitchFamily="34" charset="-120"/>
               </a:rPr>
-              <a:t>online</a:t>
+              <a:t>offline</a:t>
             </a:r>
             <a:r>
               <a:rPr lang="en-US" sz="1700" dirty="0">
@@ -11888,18 +11950,23 @@
                   <a:schemeClr val="tx1"/>
                 </a:solidFill>
               </a:rPr>
-              <a:t> (retain) di </a:t>
+              <a:t> dikirim </a:t>
+            </a:r>
+            <a:r>
+              <a:rPr lang="en-US" sz="1700" i="1" dirty="0">
+                <a:solidFill>
+                  <a:schemeClr val="tx1"/>
+                </a:solidFill>
+              </a:rPr>
+              <a:t>broker</a:t>
             </a:r>
             <a:r>
               <a:rPr lang="en-US" sz="1700" dirty="0">
                 <a:solidFill>
-                  <a:srgbClr val="A35F14"/>
-                </a:solidFill>
-                <a:latin typeface="Consolas" pitchFamily="34" charset="0"/>
-                <a:ea typeface="Consolas" pitchFamily="34" charset="-122"/>
-                <a:cs typeface="Consolas" pitchFamily="34" charset="-120"/>
-              </a:rPr>
-              <a:t>…/status</a:t>
+                  <a:schemeClr val="tx1"/>
+                </a:solidFill>
+              </a:rPr>
+              <a:t> lewat LWT</a:t>
             </a:r>
             <a:endParaRPr lang="en-US" sz="1700" dirty="0"/>
           </a:p>
